--- a/slides/Week12.pptx
+++ b/slides/Week12.pptx
@@ -198,7 +198,7 @@
 <file path=ppt/revisionInfo.xml><?xml version="1.0" encoding="utf-8"?>
 <p1510:revInfo xmlns:a="http://schemas.openxmlformats.org/drawingml/2006/main" xmlns:r="http://schemas.openxmlformats.org/officeDocument/2006/relationships" xmlns:p1510="http://schemas.microsoft.com/office/powerpoint/2015/10/main">
   <p1510:revLst>
-    <p1510:client id="{8E85CC96-32C8-4C8A-B07A-DFEB87A92E06}" v="44" dt="2026-04-06T07:27:12.931"/>
+    <p1510:client id="{8E85CC96-32C8-4C8A-B07A-DFEB87A92E06}" v="46" dt="2026-04-07T03:58:13.628"/>
   </p1510:revLst>
 </p1510:revInfo>
 </file>
@@ -208,7 +208,7 @@
   <pc:docChgLst>
     <pc:chgData name="Zhao Jin" userId="cd05a825-544c-438a-9ba1-08e63db50b47" providerId="ADAL" clId="{5DF3A229-1965-414E-AF54-F4C37AC7DF68}"/>
     <pc:docChg chg="undo custSel modSld">
-      <pc:chgData name="Zhao Jin" userId="cd05a825-544c-438a-9ba1-08e63db50b47" providerId="ADAL" clId="{5DF3A229-1965-414E-AF54-F4C37AC7DF68}" dt="2026-04-06T07:44:25.115" v="410" actId="20577"/>
+      <pc:chgData name="Zhao Jin" userId="cd05a825-544c-438a-9ba1-08e63db50b47" providerId="ADAL" clId="{5DF3A229-1965-414E-AF54-F4C37AC7DF68}" dt="2026-04-07T03:58:13.628" v="412"/>
       <pc:docMkLst>
         <pc:docMk/>
       </pc:docMkLst>
@@ -258,7 +258,7 @@
         </pc:sldMkLst>
       </pc:sldChg>
       <pc:sldChg chg="addAnim delAnim modAnim">
-        <pc:chgData name="Zhao Jin" userId="cd05a825-544c-438a-9ba1-08e63db50b47" providerId="ADAL" clId="{5DF3A229-1965-414E-AF54-F4C37AC7DF68}" dt="2026-04-06T07:21:46.098" v="390"/>
+        <pc:chgData name="Zhao Jin" userId="cd05a825-544c-438a-9ba1-08e63db50b47" providerId="ADAL" clId="{5DF3A229-1965-414E-AF54-F4C37AC7DF68}" dt="2026-04-07T03:58:13.628" v="412"/>
         <pc:sldMkLst>
           <pc:docMk/>
           <pc:sldMk cId="2550500962" sldId="592"/>
@@ -310,8 +310,8 @@
           </ac:spMkLst>
         </pc:spChg>
       </pc:sldChg>
-      <pc:sldChg chg="addSp modSp mod">
-        <pc:chgData name="Zhao Jin" userId="cd05a825-544c-438a-9ba1-08e63db50b47" providerId="ADAL" clId="{5DF3A229-1965-414E-AF54-F4C37AC7DF68}" dt="2026-04-06T07:10:10.582" v="312" actId="6549"/>
+      <pc:sldChg chg="addSp modSp mod modAnim">
+        <pc:chgData name="Zhao Jin" userId="cd05a825-544c-438a-9ba1-08e63db50b47" providerId="ADAL" clId="{5DF3A229-1965-414E-AF54-F4C37AC7DF68}" dt="2026-04-07T03:57:55.930" v="411"/>
         <pc:sldMkLst>
           <pc:docMk/>
           <pc:sldMk cId="1716205057" sldId="645"/>
@@ -964,7 +964,7 @@
               <a:pPr>
                 <a:defRPr/>
               </a:pPr>
-              <a:t>4/6/2026</a:t>
+              <a:t>4/7/2026</a:t>
             </a:fld>
             <a:endParaRPr lang="en-US"/>
           </a:p>
@@ -20825,6 +20825,51 @@
                       </p:childTnLst>
                     </p:cTn>
                   </p:par>
+                  <p:par>
+                    <p:cTn id="11" fill="hold">
+                      <p:stCondLst>
+                        <p:cond delay="indefinite"/>
+                      </p:stCondLst>
+                      <p:childTnLst>
+                        <p:par>
+                          <p:cTn id="12" fill="hold">
+                            <p:stCondLst>
+                              <p:cond delay="0"/>
+                            </p:stCondLst>
+                            <p:childTnLst>
+                              <p:par>
+                                <p:cTn id="13" presetID="1" presetClass="entr" presetSubtype="0" fill="hold" grpId="0" nodeType="clickEffect">
+                                  <p:stCondLst>
+                                    <p:cond delay="0"/>
+                                  </p:stCondLst>
+                                  <p:childTnLst>
+                                    <p:set>
+                                      <p:cBhvr>
+                                        <p:cTn id="14" dur="1" fill="hold">
+                                          <p:stCondLst>
+                                            <p:cond delay="0"/>
+                                          </p:stCondLst>
+                                        </p:cTn>
+                                        <p:tgtEl>
+                                          <p:spTgt spid="13"/>
+                                        </p:tgtEl>
+                                        <p:attrNameLst>
+                                          <p:attrName>style.visibility</p:attrName>
+                                        </p:attrNameLst>
+                                      </p:cBhvr>
+                                      <p:to>
+                                        <p:strVal val="visible"/>
+                                      </p:to>
+                                    </p:set>
+                                  </p:childTnLst>
+                                </p:cTn>
+                              </p:par>
+                            </p:childTnLst>
+                          </p:cTn>
+                        </p:par>
+                      </p:childTnLst>
+                    </p:cTn>
+                  </p:par>
                 </p:childTnLst>
               </p:cTn>
               <p:prevCondLst>
@@ -20848,6 +20893,7 @@
     </p:tnLst>
     <p:bldLst>
       <p:bldP spid="11" grpId="0" animBg="1"/>
+      <p:bldP spid="13" grpId="0" animBg="1"/>
     </p:bldLst>
   </p:timing>
 </p:sld>
@@ -26620,95 +26666,6 @@
   <p:transition>
     <p:fade/>
   </p:transition>
-  <p:timing>
-    <p:tnLst>
-      <p:par>
-        <p:cTn id="1" dur="indefinite" restart="never" nodeType="tmRoot">
-          <p:childTnLst>
-            <p:seq concurrent="1" nextAc="seek">
-              <p:cTn id="2" dur="indefinite" nodeType="mainSeq">
-                <p:childTnLst>
-                  <p:par>
-                    <p:cTn id="3" fill="hold">
-                      <p:stCondLst>
-                        <p:cond delay="indefinite"/>
-                        <p:cond evt="onBegin" delay="0">
-                          <p:tn val="2"/>
-                        </p:cond>
-                      </p:stCondLst>
-                      <p:childTnLst>
-                        <p:par>
-                          <p:cTn id="4" fill="hold">
-                            <p:stCondLst>
-                              <p:cond delay="0"/>
-                            </p:stCondLst>
-                            <p:childTnLst>
-                              <p:par>
-                                <p:cTn id="5" presetID="9" presetClass="entr" presetSubtype="0" fill="hold" grpId="0" nodeType="afterEffect">
-                                  <p:stCondLst>
-                                    <p:cond delay="0"/>
-                                  </p:stCondLst>
-                                  <p:childTnLst>
-                                    <p:set>
-                                      <p:cBhvr>
-                                        <p:cTn id="6" dur="1" fill="hold">
-                                          <p:stCondLst>
-                                            <p:cond delay="0"/>
-                                          </p:stCondLst>
-                                        </p:cTn>
-                                        <p:tgtEl>
-                                          <p:spTgt spid="19"/>
-                                        </p:tgtEl>
-                                        <p:attrNameLst>
-                                          <p:attrName>style.visibility</p:attrName>
-                                        </p:attrNameLst>
-                                      </p:cBhvr>
-                                      <p:to>
-                                        <p:strVal val="visible"/>
-                                      </p:to>
-                                    </p:set>
-                                    <p:animEffect transition="in" filter="dissolve">
-                                      <p:cBhvr>
-                                        <p:cTn id="7" dur="500"/>
-                                        <p:tgtEl>
-                                          <p:spTgt spid="19"/>
-                                        </p:tgtEl>
-                                      </p:cBhvr>
-                                    </p:animEffect>
-                                  </p:childTnLst>
-                                </p:cTn>
-                              </p:par>
-                            </p:childTnLst>
-                          </p:cTn>
-                        </p:par>
-                      </p:childTnLst>
-                    </p:cTn>
-                  </p:par>
-                </p:childTnLst>
-              </p:cTn>
-              <p:prevCondLst>
-                <p:cond evt="onPrev" delay="0">
-                  <p:tgtEl>
-                    <p:sldTgt/>
-                  </p:tgtEl>
-                </p:cond>
-              </p:prevCondLst>
-              <p:nextCondLst>
-                <p:cond evt="onNext" delay="0">
-                  <p:tgtEl>
-                    <p:sldTgt/>
-                  </p:tgtEl>
-                </p:cond>
-              </p:nextCondLst>
-            </p:seq>
-          </p:childTnLst>
-        </p:cTn>
-      </p:par>
-    </p:tnLst>
-    <p:bldLst>
-      <p:bldP spid="19" grpId="0" animBg="1"/>
-    </p:bldLst>
-  </p:timing>
 </p:sld>
 </file>
 
